--- a/macjee/MacJee_p50_alternativas.pptx
+++ b/macjee/MacJee_p50_alternativas.pptx
@@ -1276,7 +1276,7 @@
                 <a:ea typeface="Montserrat" pitchFamily="34" charset="-122"/>
                 <a:cs typeface="Montserrat" pitchFamily="34" charset="-120"/>
               </a:rPr>
-              <a:t>55 named programmes across 21 countries — every block below is sized by the value it carries</a:t>
+              <a:t>49 valued programmes across 21 countries — every block below is sized by the value it carries</a:t>
             </a:r>
             <a:endParaRPr lang="en-US" sz="1200" dirty="0"/>
           </a:p>
@@ -1791,7 +1791,7 @@
                 <a:ea typeface="Montserrat" pitchFamily="34" charset="-122"/>
                 <a:cs typeface="Montserrat" pitchFamily="34" charset="-120"/>
               </a:rPr>
-              <a:t>34 programmes · 11 countries</a:t>
+              <a:t>30 programmes · 12 countries</a:t>
             </a:r>
             <a:endParaRPr lang="en-US" sz="780" dirty="0"/>
           </a:p>
@@ -2501,7 +2501,7 @@
                 <a:ea typeface="Montserrat" pitchFamily="34" charset="-122"/>
                 <a:cs typeface="Montserrat" pitchFamily="34" charset="-120"/>
               </a:rPr>
-              <a:t>9 programmes · 5 countries</a:t>
+              <a:t>7 programmes · 6 countries</a:t>
             </a:r>
             <a:endParaRPr lang="en-US" sz="780" dirty="0"/>
           </a:p>
@@ -2657,7 +2657,7 @@
                 <a:ea typeface="Montserrat Light" pitchFamily="34" charset="-122"/>
                 <a:cs typeface="Montserrat Light" pitchFamily="34" charset="-120"/>
               </a:rPr>
-              <a:t>Identified opportunity is the total contract value of every signed contract and open commercial opportunity in the Company’s commercial review, at face value and unweighted. Coverage compares it with cumulative gross revenue in the 2026–32 plan.</a:t>
+              <a:t>Identified opportunity is the total contract value of every signed contract and open commercial opportunity in the Company’s commercial review, at face value and unweighted; a further six identified programmes carry no value yet and are excluded. Coverage compares it with cumulative gross revenue in the 2026–32 plan.</a:t>
             </a:r>
             <a:endParaRPr lang="en-US" sz="660" dirty="0"/>
           </a:p>
@@ -5669,7 +5669,7 @@
                 <a:ea typeface="Montserrat Light" pitchFamily="34" charset="-122"/>
                 <a:cs typeface="Montserrat Light" pitchFamily="34" charset="-120"/>
               </a:rPr>
-              <a:t>Identified opportunity is the total contract value of every signed contract and open commercial opportunity in the Company’s commercial review, at face value and unweighted. Plan figures are cumulative gross revenue 2026–32 in the Base case.</a:t>
+              <a:t>Identified opportunity is the total contract value of every signed contract and open commercial opportunity in the Company’s commercial review, at face value and unweighted; a further six identified programmes carry no value yet and are excluded. Plan figures are cumulative gross revenue 2026–32 in the Base case.</a:t>
             </a:r>
             <a:endParaRPr lang="en-US" sz="660" dirty="0"/>
           </a:p>
@@ -6285,7 +6285,7 @@
                 <a:ea typeface="Montserrat" pitchFamily="34" charset="-122"/>
                 <a:cs typeface="Montserrat" pitchFamily="34" charset="-120"/>
               </a:rPr>
-              <a:t>55</a:t>
+              <a:t>49</a:t>
             </a:r>
             <a:pPr algn="ctr" indent="0" marL="0">
               <a:buNone/>
@@ -6330,7 +6330,7 @@
                 <a:ea typeface="Montserrat" pitchFamily="34" charset="-122"/>
                 <a:cs typeface="Montserrat" pitchFamily="34" charset="-120"/>
               </a:rPr>
-              <a:t>Named programmes</a:t>
+              <a:t>Valued programmes</a:t>
             </a:r>
             <a:endParaRPr lang="en-US" sz="720" dirty="0"/>
           </a:p>
